--- a/public/fun/pack/pptx/familypro/가족소개프리미엄_08_3대가족_아이스블루.pptx
+++ b/public/fun/pack/pptx/familypro/가족소개프리미엄_08_3대가족_아이스블루.pptx
@@ -113,12 +113,12 @@
   <p:extLst>
     <p:ext uri="{521415D9-36F7-43E2-AB2F-B90AF26B5E84}">
       <p14:sectionLst xmlns:p14="http://schemas.microsoft.com/office/powerpoint/2010/main">
-        <p14:section name="시작" id="{E1DCC68B-A94D-4228-A2FC-DDCB7558C2C4}">
+        <p14:section name="시작" id="{C8BFEF3E-ECF6-435C-925D-E3CD06939F4E}">
           <p14:sldIdLst>
             <p14:sldId id="256"/>
           </p14:sldIdLst>
         </p14:section>
-        <p14:section name="본문" id="{CDEBE256-953D-45DC-B048-2E5CDC5B6551}">
+        <p14:section name="본문" id="{88F9E6F4-78D5-4158-BA4C-37C865B1EC71}">
           <p14:sldIdLst>
             <p14:sldId id="257"/>
             <p14:sldId id="258"/>
@@ -127,7 +127,7 @@
             <p14:sldId id="261"/>
           </p14:sldIdLst>
         </p14:section>
-        <p14:section name="마무리" id="{5CE4A39A-875F-4CED-8A96-0B0AC0CDB3D0}">
+        <p14:section name="마무리" id="{775F2091-4DAF-453E-92E4-BBC52A3C03B3}">
           <p14:sldIdLst>
             <p14:sldId id="262"/>
           </p14:sldIdLst>
@@ -1546,7 +1546,7 @@
             </a:lvl1pPr>
           </a:lstStyle>
           <a:p>
-            <a:fld id="{3674EF37-A5D4-4E57-9670-C18B0B96C92A}" type="slidenum">
+            <a:fld id="{60F69BD8-1C96-4A20-93F7-D01560B2A655}" type="slidenum">
               <a:rPr lang="en-US"/>
               <a:t>‹#›</a:t>
             </a:fld>
@@ -2186,7 +2186,7 @@
             </a:lvl1pPr>
           </a:lstStyle>
           <a:p>
-            <a:fld id="{DAACEB5F-6690-4211-92EF-FA98A0BCF123}" type="slidenum">
+            <a:fld id="{E04AE003-E45C-4F86-9469-484C5A94877F}" type="slidenum">
               <a:rPr lang="en-US"/>
               <a:t>‹#›</a:t>
             </a:fld>
@@ -2823,7 +2823,7 @@
             </a:lvl1pPr>
           </a:lstStyle>
           <a:p>
-            <a:fld id="{B3828FBA-485A-49E7-A2C8-BD5079A12768}" type="slidenum">
+            <a:fld id="{3701F6BC-FE07-4EEA-97A1-58BD1F03CB45}" type="slidenum">
               <a:rPr lang="en-US"/>
               <a:t>‹#›</a:t>
             </a:fld>
@@ -3684,7 +3684,7 @@
           <a:p>
             <a:r>
               <a:rPr lang="ko-KR"/>
-              <a:t>3대 가족 · 0000. 00. 00</a:t>
+              <a:t>3대 가족 · 날짜 입력</a:t>
             </a:r>
           </a:p>
         </p:txBody>
@@ -4219,7 +4219,7 @@
           <a:bodyPr/>
           <a:lstStyle/>
           <a:p>
-            <a:fld id="{4A6C9C47-C9CF-46BE-BEA4-E68992BE22C0}" type="slidenum">
+            <a:fld id="{EFA43D92-89DE-4FA6-BD20-C2D56F504A50}" type="slidenum">
               <a:rPr lang="en-US"/>
               <a:t>‹#›</a:t>
             </a:fld>
@@ -5261,7 +5261,7 @@
           <a:bodyPr/>
           <a:lstStyle/>
           <a:p>
-            <a:fld id="{D6C3012C-BA02-4C8B-B5CD-28C19CBC6B82}" type="slidenum">
+            <a:fld id="{ABFBE62C-4AA3-4AD1-A56D-833DB724BB92}" type="slidenum">
               <a:rPr lang="en-US"/>
               <a:t>‹#›</a:t>
             </a:fld>
@@ -6236,7 +6236,7 @@
           <a:bodyPr/>
           <a:lstStyle/>
           <a:p>
-            <a:fld id="{58BB921B-7018-4F0A-B0ED-5A1911B99BC4}" type="slidenum">
+            <a:fld id="{7663CB2B-DA48-4325-813F-19EB744ACDDD}" type="slidenum">
               <a:rPr lang="en-US"/>
               <a:t>‹#›</a:t>
             </a:fld>
@@ -7491,7 +7491,7 @@
           <a:bodyPr/>
           <a:lstStyle/>
           <a:p>
-            <a:fld id="{72C51A57-D9BB-4C45-81D8-409295572414}" type="slidenum">
+            <a:fld id="{8E27670E-A1D1-4649-8E51-539DDD8DBB84}" type="slidenum">
               <a:rPr lang="en-US"/>
               <a:t>‹#›</a:t>
             </a:fld>
@@ -7579,7 +7579,7 @@
           <a:bodyPr/>
           <a:lstStyle/>
           <a:p>
-            <a:fld id="{2394096B-C900-4672-B1FD-F36092BD403A}" type="slidenum">
+            <a:fld id="{2326A2B2-2FBC-47E9-B477-6BA185C5079A}" type="slidenum">
               <a:rPr lang="en-US"/>
               <a:t>‹#›</a:t>
             </a:fld>
